--- a/resources/annual/2026-2027/student-reports/ch04/G04-Raman-Report.pptx
+++ b/resources/annual/2026-2027/student-reports/ch04/G04-Raman-Report.pptx
@@ -663,7 +663,7 @@
           <a:lstStyle xmlns:a="http://schemas.openxmlformats.org/drawingml/2006/main"/>
           <a:p xmlns:a="http://schemas.openxmlformats.org/drawingml/2006/main">
             <a:r>
-              <a:t>完整交付见docs/ch04.md、code/ch04_exercises/raman/README.md。工作Issue：https://github.com/Oaham725/intelligent-analytical-chemistry/issues/2 。实验数据全部为模拟。真实配对验证需独立标本、仪器元数据、固定流程与新留出集，不应使用历史测试结果反复优化。</a:t>
+              <a:t>完整交付见docs/ch04.md、code/ch04_exercises/raman/README.md。当前成果：https://github.com/hachimi-rabbit/intelligent-analytical-chemistry/tree/main 。材料在个人仓库完善，课程Issue与PR暂缓。实验数据全部为模拟。真实配对验证需独立标本、仪器元数据、固定流程与新留出集，不应使用历史测试结果反复优化。</a:t>
             </a:r>
           </a:p>
         </p:txBody>
